--- a/submission/Veyronix_SIH26038_DRISHTI_PPT.pptx
+++ b/submission/Veyronix_SIH26038_DRISHTI_PPT.pptx
@@ -5517,292 +5517,9 @@
           </p:txBody>
         </p:sp>
       </p:grpSp>
-      <p:sp>
-        <p:nvSpPr>
-          <p:cNvPr name="Freeform 16" id="16"/>
-          <p:cNvSpPr/>
-          <p:nvPr/>
-        </p:nvSpPr>
-        <p:spPr>
-          <a:xfrm flipH="false" flipV="false" rot="0">
-            <a:off x="1141596" y="3492046"/>
-            <a:ext cx="16004807" cy="4163969"/>
-          </a:xfrm>
-          <a:custGeom>
-            <a:avLst/>
-            <a:gdLst/>
-            <a:ahLst/>
-            <a:cxnLst/>
-            <a:rect r="r" b="b" t="t" l="l"/>
-            <a:pathLst>
-              <a:path h="4163969" w="16004807">
-                <a:moveTo>
-                  <a:pt x="0" y="0"/>
-                </a:moveTo>
-                <a:lnTo>
-                  <a:pt x="16004808" y="0"/>
-                </a:lnTo>
-                <a:lnTo>
-                  <a:pt x="16004808" y="4163969"/>
-                </a:lnTo>
-                <a:lnTo>
-                  <a:pt x="0" y="4163969"/>
-                </a:lnTo>
-                <a:lnTo>
-                  <a:pt x="0" y="0"/>
-                </a:lnTo>
-                <a:close/>
-              </a:path>
-            </a:pathLst>
-          </a:custGeom>
-          <a:blipFill>
-            <a:blip r:embed="rId4"/>
-            <a:stretch>
-              <a:fillRect l="0" t="0" r="0" b="-48941"/>
-            </a:stretch>
-          </a:blipFill>
-        </p:spPr>
-      </p:sp>
-      <p:sp>
-        <p:nvSpPr>
-          <p:cNvPr name="TextBox 17" id="17"/>
-          <p:cNvSpPr txBox="true"/>
-          <p:nvPr/>
-        </p:nvSpPr>
-        <p:spPr>
-          <a:xfrm rot="0">
-            <a:off x="1305002" y="1636605"/>
-            <a:ext cx="15446398" cy="1747838"/>
-          </a:xfrm>
-          <a:prstGeom prst="rect">
-            <a:avLst/>
-          </a:prstGeom>
-        </p:spPr>
-        <p:txBody>
-          <a:bodyPr anchor="t" rtlCol="false" tIns="0" lIns="0" bIns="0" rIns="0">
-            <a:spAutoFit/>
-          </a:bodyPr>
-          <a:lstStyle/>
-          <a:p>
-            <a:pPr algn="just">
-              <a:lnSpc>
-                <a:spcPts val="2812"/>
-              </a:lnSpc>
-            </a:pPr>
-            <a:r>
-              <a:rPr lang="en-US" sz="1875" b="true">
-                <a:solidFill>
-                  <a:srgbClr val="0C597A"/>
-                </a:solidFill>
-                <a:latin typeface="Montserrat Bold"/>
-                <a:ea typeface="Montserrat Bold"/>
-                <a:cs typeface="Montserrat Bold"/>
-                <a:sym typeface="Montserrat Bold"/>
-              </a:rPr>
-              <a:t>Kinesio-style remote screening pipeline:</a:t>
-            </a:r>
-            <a:r>
-              <a:rPr lang="en-US" sz="1875" b="true">
-                <a:solidFill>
-                  <a:srgbClr val="0B4F6C"/>
-                </a:solidFill>
-                <a:latin typeface="Montserrat Bold"/>
-                <a:ea typeface="Montserrat Bold"/>
-                <a:cs typeface="Montserrat Bold"/>
-                <a:sym typeface="Montserrat Bold"/>
-              </a:rPr>
-              <a:t> </a:t>
-            </a:r>
-            <a:r>
-              <a:rPr lang="en-US" sz="1875" b="true">
-                <a:solidFill>
-                  <a:srgbClr val="13293D"/>
-                </a:solidFill>
-                <a:latin typeface="Montserrat Semi-Bold"/>
-                <a:ea typeface="Montserrat Semi-Bold"/>
-                <a:cs typeface="Montserrat Semi-Bold"/>
-                <a:sym typeface="Montserrat Semi-Bold"/>
-              </a:rPr>
-              <a:t>A MATLAB + Python pipeline that </a:t>
-            </a:r>
-            <a:r>
-              <a:rPr lang="en-US" sz="1875" b="true">
-                <a:solidFill>
-                  <a:srgbClr val="F16315"/>
-                </a:solidFill>
-                <a:latin typeface="Montserrat Semi-Bold"/>
-                <a:ea typeface="Montserrat Semi-Bold"/>
-                <a:cs typeface="Montserrat Semi-Bold"/>
-                <a:sym typeface="Montserrat Semi-Bold"/>
-              </a:rPr>
-              <a:t>grades diabetic retinopathy severity from a fundus photo</a:t>
-            </a:r>
-            <a:r>
-              <a:rPr lang="en-US" sz="1875" b="true">
-                <a:solidFill>
-                  <a:srgbClr val="13293D"/>
-                </a:solidFill>
-                <a:latin typeface="Montserrat Semi-Bold"/>
-                <a:ea typeface="Montserrat Semi-Bold"/>
-                <a:cs typeface="Montserrat Semi-Bold"/>
-                <a:sym typeface="Montserrat Semi-Bold"/>
-              </a:rPr>
-              <a:t>, </a:t>
-            </a:r>
-            <a:r>
-              <a:rPr lang="en-US" sz="1875" b="true">
-                <a:solidFill>
-                  <a:srgbClr val="F16315"/>
-                </a:solidFill>
-                <a:latin typeface="Montserrat Semi-Bold"/>
-                <a:ea typeface="Montserrat Semi-Bold"/>
-                <a:cs typeface="Montserrat Semi-Bold"/>
-                <a:sym typeface="Montserrat Semi-Bold"/>
-              </a:rPr>
-              <a:t>explains its reasoning </a:t>
-            </a:r>
-            <a:r>
-              <a:rPr lang="en-US" sz="1875" b="true">
-                <a:solidFill>
-                  <a:srgbClr val="13293D"/>
-                </a:solidFill>
-                <a:latin typeface="Montserrat Semi-Bold"/>
-                <a:ea typeface="Montserrat Semi-Bold"/>
-                <a:cs typeface="Montserrat Semi-Bold"/>
-                <a:sym typeface="Montserrat Semi-Bold"/>
-              </a:rPr>
-              <a:t>with lesion-level evidence and Grad-CAM, </a:t>
-            </a:r>
-            <a:r>
-              <a:rPr lang="en-US" sz="1875" b="true">
-                <a:solidFill>
-                  <a:srgbClr val="F16315"/>
-                </a:solidFill>
-                <a:latin typeface="Montserrat Semi-Bold"/>
-                <a:ea typeface="Montserrat Semi-Bold"/>
-                <a:cs typeface="Montserrat Semi-Bold"/>
-                <a:sym typeface="Montserrat Semi-Bold"/>
-              </a:rPr>
-              <a:t>routes uncertain cases to a human</a:t>
-            </a:r>
-            <a:r>
-              <a:rPr lang="en-US" sz="1875" b="true">
-                <a:solidFill>
-                  <a:srgbClr val="13293D"/>
-                </a:solidFill>
-                <a:latin typeface="Montserrat Semi-Bold"/>
-                <a:ea typeface="Montserrat Semi-Bold"/>
-                <a:cs typeface="Montserrat Semi-Bold"/>
-                <a:sym typeface="Montserrat Semi-Bold"/>
-              </a:rPr>
-              <a:t>, and </a:t>
-            </a:r>
-            <a:r>
-              <a:rPr lang="en-US" sz="1875" b="true">
-                <a:solidFill>
-                  <a:srgbClr val="F16315"/>
-                </a:solidFill>
-                <a:latin typeface="Montserrat Semi-Bold"/>
-                <a:ea typeface="Montserrat Semi-Bold"/>
-                <a:cs typeface="Montserrat Semi-Bold"/>
-                <a:sym typeface="Montserrat Semi-Bold"/>
-              </a:rPr>
-              <a:t>models district-level rollout capacity</a:t>
-            </a:r>
-            <a:r>
-              <a:rPr lang="en-US" sz="1875" b="true">
-                <a:solidFill>
-                  <a:srgbClr val="13293D"/>
-                </a:solidFill>
-                <a:latin typeface="Montserrat Semi-Bold"/>
-                <a:ea typeface="Montserrat Semi-Bold"/>
-                <a:cs typeface="Montserrat Semi-Bold"/>
-                <a:sym typeface="Montserrat Semi-Bold"/>
-              </a:rPr>
-              <a:t> — so a single ophthalmologist can safely screen 100,000+ patients/year through ASHA workers and PHCs.</a:t>
-            </a:r>
-          </a:p>
-          <a:p>
-            <a:pPr algn="just">
-              <a:lnSpc>
-                <a:spcPts val="2812"/>
-              </a:lnSpc>
-            </a:pPr>
-            <a:r>
-              <a:rPr lang="en-US" sz="1875" b="true">
-                <a:solidFill>
-                  <a:srgbClr val="13293D"/>
-                </a:solidFill>
-                <a:latin typeface="Montserrat Semi-Bold"/>
-                <a:ea typeface="Montserrat Semi-Bold"/>
-                <a:cs typeface="Montserrat Semi-Bold"/>
-                <a:sym typeface="Montserrat Semi-Bold"/>
-              </a:rPr>
-              <a:t>Live Deployment: </a:t>
-            </a:r>
-            <a:r>
-              <a:rPr lang="en-US" b="true" sz="1875" u="sng">
-                <a:solidFill>
-                  <a:srgbClr val="13293D"/>
-                </a:solidFill>
-                <a:latin typeface="Montserrat Semi-Bold"/>
-                <a:ea typeface="Montserrat Semi-Bold"/>
-                <a:cs typeface="Montserrat Semi-Bold"/>
-                <a:sym typeface="Montserrat Semi-Bold"/>
-                <a:hlinkClick r:id="rId5" tooltip="https://drishti-frontend-c9mj.onrender.com"/>
-              </a:rPr>
-              <a:t>https://drishti-frontend-c9mj.onrender.com/</a:t>
-            </a:r>
-          </a:p>
-        </p:txBody>
-      </p:sp>
-      <p:sp>
-        <p:nvSpPr>
-          <p:cNvPr name="TextBox 18" id="18"/>
-          <p:cNvSpPr txBox="true"/>
-          <p:nvPr/>
-        </p:nvSpPr>
-        <p:spPr>
-          <a:xfrm rot="0">
-            <a:off x="3961152" y="982136"/>
-            <a:ext cx="9703594" cy="342900"/>
-          </a:xfrm>
-          <a:prstGeom prst="rect">
-            <a:avLst/>
-          </a:prstGeom>
-        </p:spPr>
-        <p:txBody>
-          <a:bodyPr anchor="t" rtlCol="false" tIns="0" lIns="0" bIns="0" rIns="0">
-            <a:spAutoFit/>
-          </a:bodyPr>
-          <a:lstStyle/>
-          <a:p>
-            <a:pPr algn="ctr">
-              <a:lnSpc>
-                <a:spcPts val="2789"/>
-              </a:lnSpc>
-              <a:spcBef>
-                <a:spcPct val="0"/>
-              </a:spcBef>
-            </a:pPr>
-            <a:r>
-              <a:rPr lang="en-US" b="true" sz="2324">
-                <a:solidFill>
-                  <a:srgbClr val="C00000"/>
-                </a:solidFill>
-                <a:latin typeface="Libre Baskerville Bold"/>
-                <a:ea typeface="Libre Baskerville Bold"/>
-                <a:cs typeface="Libre Baskerville Bold"/>
-                <a:sym typeface="Libre Baskerville Bold"/>
-              </a:rPr>
-              <a:t>Explainable AI Diabetic Retinopathy Screening for Rural India</a:t>
-            </a:r>
-          </a:p>
-        </p:txBody>
-      </p:sp>
       <p:grpSp>
         <p:nvGrpSpPr>
-          <p:cNvPr name="Group 19" id="19"/>
+          <p:cNvPr name="Group 16" id="16"/>
           <p:cNvGrpSpPr/>
           <p:nvPr/>
         </p:nvGrpSpPr>
@@ -5816,13 +5533,138 @@
         </p:grpSpPr>
         <p:grpSp>
           <p:nvGrpSpPr>
+            <p:cNvPr name="Group 17" id="17"/>
+            <p:cNvGrpSpPr/>
+            <p:nvPr/>
+          </p:nvGrpSpPr>
+          <p:grpSpPr>
+            <a:xfrm rot="0">
+              <a:off x="0" y="0"/>
+              <a:ext cx="4114800" cy="2449018"/>
+              <a:chOff x="0" y="0"/>
+              <a:chExt cx="812800" cy="483757"/>
+            </a:xfrm>
+          </p:grpSpPr>
+          <p:sp>
+            <p:nvSpPr>
+              <p:cNvPr name="Freeform 18" id="18"/>
+              <p:cNvSpPr/>
+              <p:nvPr/>
+            </p:nvSpPr>
+            <p:spPr>
+              <a:xfrm flipH="false" flipV="false" rot="0">
+                <a:off x="0" y="0"/>
+                <a:ext cx="812800" cy="483757"/>
+              </a:xfrm>
+              <a:custGeom>
+                <a:avLst/>
+                <a:gdLst/>
+                <a:ahLst/>
+                <a:cxnLst/>
+                <a:rect r="r" b="b" t="t" l="l"/>
+                <a:pathLst>
+                  <a:path h="483757" w="812800">
+                    <a:moveTo>
+                      <a:pt x="127941" y="0"/>
+                    </a:moveTo>
+                    <a:lnTo>
+                      <a:pt x="684859" y="0"/>
+                    </a:lnTo>
+                    <a:cubicBezTo>
+                      <a:pt x="718791" y="0"/>
+                      <a:pt x="751333" y="13479"/>
+                      <a:pt x="775327" y="37473"/>
+                    </a:cubicBezTo>
+                    <a:cubicBezTo>
+                      <a:pt x="799321" y="61467"/>
+                      <a:pt x="812800" y="94009"/>
+                      <a:pt x="812800" y="127941"/>
+                    </a:cubicBezTo>
+                    <a:lnTo>
+                      <a:pt x="812800" y="355816"/>
+                    </a:lnTo>
+                    <a:cubicBezTo>
+                      <a:pt x="812800" y="389748"/>
+                      <a:pt x="799321" y="422290"/>
+                      <a:pt x="775327" y="446284"/>
+                    </a:cubicBezTo>
+                    <a:cubicBezTo>
+                      <a:pt x="751333" y="470277"/>
+                      <a:pt x="718791" y="483757"/>
+                      <a:pt x="684859" y="483757"/>
+                    </a:cubicBezTo>
+                    <a:lnTo>
+                      <a:pt x="127941" y="483757"/>
+                    </a:lnTo>
+                    <a:cubicBezTo>
+                      <a:pt x="94009" y="483757"/>
+                      <a:pt x="61467" y="470277"/>
+                      <a:pt x="37473" y="446284"/>
+                    </a:cubicBezTo>
+                    <a:cubicBezTo>
+                      <a:pt x="13479" y="422290"/>
+                      <a:pt x="0" y="389748"/>
+                      <a:pt x="0" y="355816"/>
+                    </a:cubicBezTo>
+                    <a:lnTo>
+                      <a:pt x="0" y="127941"/>
+                    </a:lnTo>
+                    <a:cubicBezTo>
+                      <a:pt x="0" y="94009"/>
+                      <a:pt x="13479" y="61467"/>
+                      <a:pt x="37473" y="37473"/>
+                    </a:cubicBezTo>
+                    <a:cubicBezTo>
+                      <a:pt x="61467" y="13479"/>
+                      <a:pt x="94009" y="0"/>
+                      <a:pt x="127941" y="0"/>
+                    </a:cubicBezTo>
+                    <a:close/>
+                  </a:path>
+                </a:pathLst>
+              </a:custGeom>
+              <a:solidFill>
+                <a:srgbClr val="F2FBEC"/>
+              </a:solidFill>
+            </p:spPr>
+          </p:sp>
+          <p:sp>
+            <p:nvSpPr>
+              <p:cNvPr name="TextBox 19" id="19"/>
+              <p:cNvSpPr txBox="true"/>
+              <p:nvPr/>
+            </p:nvSpPr>
+            <p:spPr>
+              <a:xfrm>
+                <a:off x="0" y="-9525"/>
+                <a:ext cx="812800" cy="493282"/>
+              </a:xfrm>
+              <a:prstGeom prst="rect">
+                <a:avLst/>
+              </a:prstGeom>
+            </p:spPr>
+            <p:txBody>
+              <a:bodyPr anchor="ctr" rtlCol="false" tIns="50800" lIns="50800" bIns="50800" rIns="50800"/>
+              <a:lstStyle/>
+              <a:p>
+                <a:pPr algn="ctr">
+                  <a:lnSpc>
+                    <a:spcPts val="1709"/>
+                  </a:lnSpc>
+                </a:pPr>
+              </a:p>
+            </p:txBody>
+          </p:sp>
+        </p:grpSp>
+        <p:grpSp>
+          <p:nvGrpSpPr>
             <p:cNvPr name="Group 20" id="20"/>
             <p:cNvGrpSpPr/>
             <p:nvPr/>
           </p:nvGrpSpPr>
           <p:grpSpPr>
             <a:xfrm rot="0">
-              <a:off x="0" y="0"/>
+              <a:off x="14996260" y="85141"/>
               <a:ext cx="4114800" cy="2449018"/>
               <a:chOff x="0" y="0"/>
               <a:chExt cx="812800" cy="483757"/>
@@ -5947,7 +5789,7 @@
           </p:nvGrpSpPr>
           <p:grpSpPr>
             <a:xfrm rot="0">
-              <a:off x="14996260" y="85141"/>
+              <a:off x="5077338" y="60064"/>
               <a:ext cx="4114800" cy="2449018"/>
               <a:chOff x="0" y="0"/>
               <a:chExt cx="812800" cy="483757"/>
@@ -6072,7 +5914,7 @@
           </p:nvGrpSpPr>
           <p:grpSpPr>
             <a:xfrm rot="0">
-              <a:off x="5077338" y="60064"/>
+              <a:off x="10065423" y="0"/>
               <a:ext cx="4114800" cy="2449018"/>
               <a:chOff x="0" y="0"/>
               <a:chExt cx="812800" cy="483757"/>
@@ -6189,134 +6031,9 @@
             </p:txBody>
           </p:sp>
         </p:grpSp>
-        <p:grpSp>
-          <p:nvGrpSpPr>
-            <p:cNvPr name="Group 29" id="29"/>
-            <p:cNvGrpSpPr/>
-            <p:nvPr/>
-          </p:nvGrpSpPr>
-          <p:grpSpPr>
-            <a:xfrm rot="0">
-              <a:off x="10065423" y="0"/>
-              <a:ext cx="4114800" cy="2449018"/>
-              <a:chOff x="0" y="0"/>
-              <a:chExt cx="812800" cy="483757"/>
-            </a:xfrm>
-          </p:grpSpPr>
-          <p:sp>
-            <p:nvSpPr>
-              <p:cNvPr name="Freeform 30" id="30"/>
-              <p:cNvSpPr/>
-              <p:nvPr/>
-            </p:nvSpPr>
-            <p:spPr>
-              <a:xfrm flipH="false" flipV="false" rot="0">
-                <a:off x="0" y="0"/>
-                <a:ext cx="812800" cy="483757"/>
-              </a:xfrm>
-              <a:custGeom>
-                <a:avLst/>
-                <a:gdLst/>
-                <a:ahLst/>
-                <a:cxnLst/>
-                <a:rect r="r" b="b" t="t" l="l"/>
-                <a:pathLst>
-                  <a:path h="483757" w="812800">
-                    <a:moveTo>
-                      <a:pt x="127941" y="0"/>
-                    </a:moveTo>
-                    <a:lnTo>
-                      <a:pt x="684859" y="0"/>
-                    </a:lnTo>
-                    <a:cubicBezTo>
-                      <a:pt x="718791" y="0"/>
-                      <a:pt x="751333" y="13479"/>
-                      <a:pt x="775327" y="37473"/>
-                    </a:cubicBezTo>
-                    <a:cubicBezTo>
-                      <a:pt x="799321" y="61467"/>
-                      <a:pt x="812800" y="94009"/>
-                      <a:pt x="812800" y="127941"/>
-                    </a:cubicBezTo>
-                    <a:lnTo>
-                      <a:pt x="812800" y="355816"/>
-                    </a:lnTo>
-                    <a:cubicBezTo>
-                      <a:pt x="812800" y="389748"/>
-                      <a:pt x="799321" y="422290"/>
-                      <a:pt x="775327" y="446284"/>
-                    </a:cubicBezTo>
-                    <a:cubicBezTo>
-                      <a:pt x="751333" y="470277"/>
-                      <a:pt x="718791" y="483757"/>
-                      <a:pt x="684859" y="483757"/>
-                    </a:cubicBezTo>
-                    <a:lnTo>
-                      <a:pt x="127941" y="483757"/>
-                    </a:lnTo>
-                    <a:cubicBezTo>
-                      <a:pt x="94009" y="483757"/>
-                      <a:pt x="61467" y="470277"/>
-                      <a:pt x="37473" y="446284"/>
-                    </a:cubicBezTo>
-                    <a:cubicBezTo>
-                      <a:pt x="13479" y="422290"/>
-                      <a:pt x="0" y="389748"/>
-                      <a:pt x="0" y="355816"/>
-                    </a:cubicBezTo>
-                    <a:lnTo>
-                      <a:pt x="0" y="127941"/>
-                    </a:lnTo>
-                    <a:cubicBezTo>
-                      <a:pt x="0" y="94009"/>
-                      <a:pt x="13479" y="61467"/>
-                      <a:pt x="37473" y="37473"/>
-                    </a:cubicBezTo>
-                    <a:cubicBezTo>
-                      <a:pt x="61467" y="13479"/>
-                      <a:pt x="94009" y="0"/>
-                      <a:pt x="127941" y="0"/>
-                    </a:cubicBezTo>
-                    <a:close/>
-                  </a:path>
-                </a:pathLst>
-              </a:custGeom>
-              <a:solidFill>
-                <a:srgbClr val="F2FBEC"/>
-              </a:solidFill>
-            </p:spPr>
-          </p:sp>
-          <p:sp>
-            <p:nvSpPr>
-              <p:cNvPr name="TextBox 31" id="31"/>
-              <p:cNvSpPr txBox="true"/>
-              <p:nvPr/>
-            </p:nvSpPr>
-            <p:spPr>
-              <a:xfrm>
-                <a:off x="0" y="-9525"/>
-                <a:ext cx="812800" cy="493282"/>
-              </a:xfrm>
-              <a:prstGeom prst="rect">
-                <a:avLst/>
-              </a:prstGeom>
-            </p:spPr>
-            <p:txBody>
-              <a:bodyPr anchor="ctr" rtlCol="false" tIns="50800" lIns="50800" bIns="50800" rIns="50800"/>
-              <a:lstStyle/>
-              <a:p>
-                <a:pPr algn="ctr">
-                  <a:lnSpc>
-                    <a:spcPts val="1709"/>
-                  </a:lnSpc>
-                </a:pPr>
-              </a:p>
-            </p:txBody>
-          </p:sp>
-        </p:grpSp>
         <p:sp>
           <p:nvSpPr>
-            <p:cNvPr name="Freeform 32" id="32"/>
+            <p:cNvPr name="Freeform 29" id="29"/>
             <p:cNvSpPr/>
             <p:nvPr/>
           </p:nvSpPr>
@@ -6353,7 +6070,7 @@
               </a:pathLst>
             </a:custGeom>
             <a:blipFill>
-              <a:blip r:embed="rId6">
+              <a:blip r:embed="rId4">
                 <a:alphaModFix amt="30000"/>
               </a:blip>
               <a:stretch>
@@ -6364,7 +6081,7 @@
         </p:sp>
         <p:sp>
           <p:nvSpPr>
-            <p:cNvPr name="Freeform 33" id="33"/>
+            <p:cNvPr name="Freeform 30" id="30"/>
             <p:cNvSpPr/>
             <p:nvPr/>
           </p:nvSpPr>
@@ -6401,7 +6118,7 @@
               </a:pathLst>
             </a:custGeom>
             <a:blipFill>
-              <a:blip r:embed="rId7">
+              <a:blip r:embed="rId5">
                 <a:alphaModFix amt="30000"/>
               </a:blip>
               <a:stretch>
@@ -6412,7 +6129,7 @@
         </p:sp>
         <p:sp>
           <p:nvSpPr>
-            <p:cNvPr name="Freeform 34" id="34"/>
+            <p:cNvPr name="Freeform 31" id="31"/>
             <p:cNvSpPr/>
             <p:nvPr/>
           </p:nvSpPr>
@@ -6449,7 +6166,7 @@
               </a:pathLst>
             </a:custGeom>
             <a:blipFill>
-              <a:blip r:embed="rId8">
+              <a:blip r:embed="rId6">
                 <a:alphaModFix amt="30000"/>
               </a:blip>
               <a:stretch>
@@ -6460,7 +6177,7 @@
         </p:sp>
         <p:sp>
           <p:nvSpPr>
-            <p:cNvPr name="Freeform 35" id="35"/>
+            <p:cNvPr name="Freeform 32" id="32"/>
             <p:cNvSpPr/>
             <p:nvPr/>
           </p:nvSpPr>
@@ -6497,7 +6214,7 @@
               </a:pathLst>
             </a:custGeom>
             <a:blipFill>
-              <a:blip r:embed="rId9">
+              <a:blip r:embed="rId7">
                 <a:alphaModFix amt="30000"/>
               </a:blip>
               <a:stretch>
@@ -6508,7 +6225,7 @@
         </p:sp>
         <p:sp>
           <p:nvSpPr>
-            <p:cNvPr name="TextBox 36" id="36"/>
+            <p:cNvPr name="TextBox 33" id="33"/>
             <p:cNvSpPr txBox="true"/>
             <p:nvPr/>
           </p:nvSpPr>
@@ -6571,7 +6288,7 @@
         </p:sp>
         <p:sp>
           <p:nvSpPr>
-            <p:cNvPr name="TextBox 37" id="37"/>
+            <p:cNvPr name="TextBox 34" id="34"/>
             <p:cNvSpPr txBox="true"/>
             <p:nvPr/>
           </p:nvSpPr>
@@ -6641,7 +6358,7 @@
         </p:sp>
         <p:sp>
           <p:nvSpPr>
-            <p:cNvPr name="TextBox 38" id="38"/>
+            <p:cNvPr name="TextBox 35" id="35"/>
             <p:cNvSpPr txBox="true"/>
             <p:nvPr/>
           </p:nvSpPr>
@@ -6723,7 +6440,7 @@
         </p:sp>
         <p:sp>
           <p:nvSpPr>
-            <p:cNvPr name="TextBox 39" id="39"/>
+            <p:cNvPr name="TextBox 36" id="36"/>
             <p:cNvSpPr txBox="true"/>
             <p:nvPr/>
           </p:nvSpPr>
@@ -6818,7 +6535,7 @@
       </p:grpSp>
       <p:grpSp>
         <p:nvGrpSpPr>
-          <p:cNvPr name="Group 40" id="40"/>
+          <p:cNvPr name="Group 37" id="37"/>
           <p:cNvGrpSpPr/>
           <p:nvPr/>
         </p:nvGrpSpPr>
@@ -6832,7 +6549,7 @@
         </p:grpSpPr>
         <p:sp>
           <p:nvSpPr>
-            <p:cNvPr name="Freeform 41" id="41"/>
+            <p:cNvPr name="Freeform 38" id="38"/>
             <p:cNvSpPr/>
             <p:nvPr/>
           </p:nvSpPr>
@@ -6869,7 +6586,7 @@
               </a:pathLst>
             </a:custGeom>
             <a:blipFill>
-              <a:blip r:embed="rId10"/>
+              <a:blip r:embed="rId8"/>
               <a:stretch>
                 <a:fillRect l="-1736" t="0" r="-1736" b="0"/>
               </a:stretch>
@@ -6877,6 +6594,289 @@
           </p:spPr>
         </p:sp>
       </p:grpSp>
+      <p:sp>
+        <p:nvSpPr>
+          <p:cNvPr name="Freeform 39" id="39"/>
+          <p:cNvSpPr/>
+          <p:nvPr/>
+        </p:nvSpPr>
+        <p:spPr>
+          <a:xfrm flipH="false" flipV="false" rot="0">
+            <a:off x="1190702" y="3384442"/>
+            <a:ext cx="16392293" cy="4302977"/>
+          </a:xfrm>
+          <a:custGeom>
+            <a:avLst/>
+            <a:gdLst/>
+            <a:ahLst/>
+            <a:cxnLst/>
+            <a:rect r="r" b="b" t="t" l="l"/>
+            <a:pathLst>
+              <a:path h="4302977" w="16392293">
+                <a:moveTo>
+                  <a:pt x="0" y="0"/>
+                </a:moveTo>
+                <a:lnTo>
+                  <a:pt x="16392293" y="0"/>
+                </a:lnTo>
+                <a:lnTo>
+                  <a:pt x="16392293" y="4302977"/>
+                </a:lnTo>
+                <a:lnTo>
+                  <a:pt x="0" y="4302977"/>
+                </a:lnTo>
+                <a:lnTo>
+                  <a:pt x="0" y="0"/>
+                </a:lnTo>
+                <a:close/>
+              </a:path>
+            </a:pathLst>
+          </a:custGeom>
+          <a:blipFill>
+            <a:blip r:embed="rId9"/>
+            <a:stretch>
+              <a:fillRect l="0" t="0" r="0" b="0"/>
+            </a:stretch>
+          </a:blipFill>
+        </p:spPr>
+      </p:sp>
+      <p:sp>
+        <p:nvSpPr>
+          <p:cNvPr name="TextBox 40" id="40"/>
+          <p:cNvSpPr txBox="true"/>
+          <p:nvPr/>
+        </p:nvSpPr>
+        <p:spPr>
+          <a:xfrm rot="0">
+            <a:off x="1305002" y="1636605"/>
+            <a:ext cx="15446398" cy="1747838"/>
+          </a:xfrm>
+          <a:prstGeom prst="rect">
+            <a:avLst/>
+          </a:prstGeom>
+        </p:spPr>
+        <p:txBody>
+          <a:bodyPr anchor="t" rtlCol="false" tIns="0" lIns="0" bIns="0" rIns="0">
+            <a:spAutoFit/>
+          </a:bodyPr>
+          <a:lstStyle/>
+          <a:p>
+            <a:pPr algn="just">
+              <a:lnSpc>
+                <a:spcPts val="2812"/>
+              </a:lnSpc>
+            </a:pPr>
+            <a:r>
+              <a:rPr lang="en-US" sz="1875" b="true">
+                <a:solidFill>
+                  <a:srgbClr val="0C597A"/>
+                </a:solidFill>
+                <a:latin typeface="Montserrat Bold"/>
+                <a:ea typeface="Montserrat Bold"/>
+                <a:cs typeface="Montserrat Bold"/>
+                <a:sym typeface="Montserrat Bold"/>
+              </a:rPr>
+              <a:t>Kiosk-style remote screening pipeline:</a:t>
+            </a:r>
+            <a:r>
+              <a:rPr lang="en-US" sz="1875" b="true">
+                <a:solidFill>
+                  <a:srgbClr val="0B4F6C"/>
+                </a:solidFill>
+                <a:latin typeface="Montserrat Bold"/>
+                <a:ea typeface="Montserrat Bold"/>
+                <a:cs typeface="Montserrat Bold"/>
+                <a:sym typeface="Montserrat Bold"/>
+              </a:rPr>
+              <a:t> </a:t>
+            </a:r>
+            <a:r>
+              <a:rPr lang="en-US" sz="1875" b="true">
+                <a:solidFill>
+                  <a:srgbClr val="13293D"/>
+                </a:solidFill>
+                <a:latin typeface="Montserrat Semi-Bold"/>
+                <a:ea typeface="Montserrat Semi-Bold"/>
+                <a:cs typeface="Montserrat Semi-Bold"/>
+                <a:sym typeface="Montserrat Semi-Bold"/>
+              </a:rPr>
+              <a:t>A MATLAB + Python pipeline that </a:t>
+            </a:r>
+            <a:r>
+              <a:rPr lang="en-US" sz="1875" b="true">
+                <a:solidFill>
+                  <a:srgbClr val="F16315"/>
+                </a:solidFill>
+                <a:latin typeface="Montserrat Semi-Bold"/>
+                <a:ea typeface="Montserrat Semi-Bold"/>
+                <a:cs typeface="Montserrat Semi-Bold"/>
+                <a:sym typeface="Montserrat Semi-Bold"/>
+              </a:rPr>
+              <a:t>grades diabetic retinopathy severity from a fundus photo</a:t>
+            </a:r>
+            <a:r>
+              <a:rPr lang="en-US" sz="1875" b="true">
+                <a:solidFill>
+                  <a:srgbClr val="13293D"/>
+                </a:solidFill>
+                <a:latin typeface="Montserrat Semi-Bold"/>
+                <a:ea typeface="Montserrat Semi-Bold"/>
+                <a:cs typeface="Montserrat Semi-Bold"/>
+                <a:sym typeface="Montserrat Semi-Bold"/>
+              </a:rPr>
+              <a:t>, </a:t>
+            </a:r>
+            <a:r>
+              <a:rPr lang="en-US" sz="1875" b="true">
+                <a:solidFill>
+                  <a:srgbClr val="F16315"/>
+                </a:solidFill>
+                <a:latin typeface="Montserrat Semi-Bold"/>
+                <a:ea typeface="Montserrat Semi-Bold"/>
+                <a:cs typeface="Montserrat Semi-Bold"/>
+                <a:sym typeface="Montserrat Semi-Bold"/>
+              </a:rPr>
+              <a:t>explains its reasoning </a:t>
+            </a:r>
+            <a:r>
+              <a:rPr lang="en-US" sz="1875" b="true">
+                <a:solidFill>
+                  <a:srgbClr val="13293D"/>
+                </a:solidFill>
+                <a:latin typeface="Montserrat Semi-Bold"/>
+                <a:ea typeface="Montserrat Semi-Bold"/>
+                <a:cs typeface="Montserrat Semi-Bold"/>
+                <a:sym typeface="Montserrat Semi-Bold"/>
+              </a:rPr>
+              <a:t>with lesion-level evidence and Grad-CAM, </a:t>
+            </a:r>
+            <a:r>
+              <a:rPr lang="en-US" sz="1875" b="true">
+                <a:solidFill>
+                  <a:srgbClr val="F16315"/>
+                </a:solidFill>
+                <a:latin typeface="Montserrat Semi-Bold"/>
+                <a:ea typeface="Montserrat Semi-Bold"/>
+                <a:cs typeface="Montserrat Semi-Bold"/>
+                <a:sym typeface="Montserrat Semi-Bold"/>
+              </a:rPr>
+              <a:t>routes uncertain cases to a human</a:t>
+            </a:r>
+            <a:r>
+              <a:rPr lang="en-US" sz="1875" b="true">
+                <a:solidFill>
+                  <a:srgbClr val="13293D"/>
+                </a:solidFill>
+                <a:latin typeface="Montserrat Semi-Bold"/>
+                <a:ea typeface="Montserrat Semi-Bold"/>
+                <a:cs typeface="Montserrat Semi-Bold"/>
+                <a:sym typeface="Montserrat Semi-Bold"/>
+              </a:rPr>
+              <a:t>, and </a:t>
+            </a:r>
+            <a:r>
+              <a:rPr lang="en-US" sz="1875" b="true">
+                <a:solidFill>
+                  <a:srgbClr val="F16315"/>
+                </a:solidFill>
+                <a:latin typeface="Montserrat Semi-Bold"/>
+                <a:ea typeface="Montserrat Semi-Bold"/>
+                <a:cs typeface="Montserrat Semi-Bold"/>
+                <a:sym typeface="Montserrat Semi-Bold"/>
+              </a:rPr>
+              <a:t>models district-level rollout capacity</a:t>
+            </a:r>
+            <a:r>
+              <a:rPr lang="en-US" sz="1875" b="true">
+                <a:solidFill>
+                  <a:srgbClr val="13293D"/>
+                </a:solidFill>
+                <a:latin typeface="Montserrat Semi-Bold"/>
+                <a:ea typeface="Montserrat Semi-Bold"/>
+                <a:cs typeface="Montserrat Semi-Bold"/>
+                <a:sym typeface="Montserrat Semi-Bold"/>
+              </a:rPr>
+              <a:t> — so a single ophthalmologist can safely screen 100,000+ patients/year through ASHA workers and PHCs.</a:t>
+            </a:r>
+          </a:p>
+          <a:p>
+            <a:pPr algn="just">
+              <a:lnSpc>
+                <a:spcPts val="2812"/>
+              </a:lnSpc>
+            </a:pPr>
+            <a:r>
+              <a:rPr lang="en-US" sz="1875" b="true">
+                <a:solidFill>
+                  <a:srgbClr val="13293D"/>
+                </a:solidFill>
+                <a:latin typeface="Montserrat Semi-Bold"/>
+                <a:ea typeface="Montserrat Semi-Bold"/>
+                <a:cs typeface="Montserrat Semi-Bold"/>
+                <a:sym typeface="Montserrat Semi-Bold"/>
+              </a:rPr>
+              <a:t>Live Deployment: </a:t>
+            </a:r>
+            <a:r>
+              <a:rPr lang="en-US" b="true" sz="1875" u="sng">
+                <a:solidFill>
+                  <a:srgbClr val="13293D"/>
+                </a:solidFill>
+                <a:latin typeface="Montserrat Semi-Bold"/>
+                <a:ea typeface="Montserrat Semi-Bold"/>
+                <a:cs typeface="Montserrat Semi-Bold"/>
+                <a:sym typeface="Montserrat Semi-Bold"/>
+                <a:hlinkClick r:id="rId10" tooltip="https://drishti-frontend-c9mj.onrender.com"/>
+              </a:rPr>
+              <a:t>https://drishti-frontend-c9mj.onrender.com/</a:t>
+            </a:r>
+          </a:p>
+        </p:txBody>
+      </p:sp>
+      <p:sp>
+        <p:nvSpPr>
+          <p:cNvPr name="TextBox 41" id="41"/>
+          <p:cNvSpPr txBox="true"/>
+          <p:nvPr/>
+        </p:nvSpPr>
+        <p:spPr>
+          <a:xfrm rot="0">
+            <a:off x="3961152" y="982136"/>
+            <a:ext cx="9703594" cy="342900"/>
+          </a:xfrm>
+          <a:prstGeom prst="rect">
+            <a:avLst/>
+          </a:prstGeom>
+        </p:spPr>
+        <p:txBody>
+          <a:bodyPr anchor="t" rtlCol="false" tIns="0" lIns="0" bIns="0" rIns="0">
+            <a:spAutoFit/>
+          </a:bodyPr>
+          <a:lstStyle/>
+          <a:p>
+            <a:pPr algn="ctr">
+              <a:lnSpc>
+                <a:spcPts val="2789"/>
+              </a:lnSpc>
+              <a:spcBef>
+                <a:spcPct val="0"/>
+              </a:spcBef>
+            </a:pPr>
+            <a:r>
+              <a:rPr lang="en-US" b="true" sz="2324">
+                <a:solidFill>
+                  <a:srgbClr val="C00000"/>
+                </a:solidFill>
+                <a:latin typeface="Libre Baskerville Bold"/>
+                <a:ea typeface="Libre Baskerville Bold"/>
+                <a:cs typeface="Libre Baskerville Bold"/>
+                <a:sym typeface="Libre Baskerville Bold"/>
+              </a:rPr>
+              <a:t>Explainable AI Diabetic Retinopathy Screening for Rural India</a:t>
+            </a:r>
+          </a:p>
+        </p:txBody>
+      </p:sp>
     </p:spTree>
   </p:cSld>
   <p:clrMapOvr>
@@ -7516,178 +7516,9 @@
           </a:blipFill>
         </p:spPr>
       </p:sp>
-      <p:sp>
-        <p:nvSpPr>
-          <p:cNvPr name="Freeform 19" id="19"/>
-          <p:cNvSpPr/>
-          <p:nvPr/>
-        </p:nvSpPr>
-        <p:spPr>
-          <a:xfrm flipH="false" flipV="false" rot="0">
-            <a:off x="6972300" y="2061156"/>
-            <a:ext cx="10866958" cy="6934977"/>
-          </a:xfrm>
-          <a:custGeom>
-            <a:avLst/>
-            <a:gdLst/>
-            <a:ahLst/>
-            <a:cxnLst/>
-            <a:rect r="r" b="b" t="t" l="l"/>
-            <a:pathLst>
-              <a:path h="6934977" w="10866958">
-                <a:moveTo>
-                  <a:pt x="0" y="0"/>
-                </a:moveTo>
-                <a:lnTo>
-                  <a:pt x="10866958" y="0"/>
-                </a:lnTo>
-                <a:lnTo>
-                  <a:pt x="10866958" y="6934977"/>
-                </a:lnTo>
-                <a:lnTo>
-                  <a:pt x="0" y="6934977"/>
-                </a:lnTo>
-                <a:lnTo>
-                  <a:pt x="0" y="0"/>
-                </a:lnTo>
-                <a:close/>
-              </a:path>
-            </a:pathLst>
-          </a:custGeom>
-          <a:blipFill>
-            <a:blip r:embed="rId7"/>
-            <a:stretch>
-              <a:fillRect l="0" t="0" r="0" b="0"/>
-            </a:stretch>
-          </a:blipFill>
-        </p:spPr>
-      </p:sp>
-      <p:sp>
-        <p:nvSpPr>
-          <p:cNvPr name="TextBox 20" id="20"/>
-          <p:cNvSpPr txBox="true"/>
-          <p:nvPr/>
-        </p:nvSpPr>
-        <p:spPr>
-          <a:xfrm rot="0">
-            <a:off x="1089057" y="1509712"/>
-            <a:ext cx="3304104" cy="409575"/>
-          </a:xfrm>
-          <a:prstGeom prst="rect">
-            <a:avLst/>
-          </a:prstGeom>
-        </p:spPr>
-        <p:txBody>
-          <a:bodyPr anchor="t" rtlCol="false" tIns="0" lIns="0" bIns="0" rIns="0">
-            <a:spAutoFit/>
-          </a:bodyPr>
-          <a:lstStyle/>
-          <a:p>
-            <a:pPr algn="just">
-              <a:lnSpc>
-                <a:spcPts val="3299"/>
-              </a:lnSpc>
-            </a:pPr>
-            <a:r>
-              <a:rPr lang="en-US" b="true" sz="2749">
-                <a:solidFill>
-                  <a:srgbClr val="C00000"/>
-                </a:solidFill>
-                <a:latin typeface="Libre Baskerville Bold"/>
-                <a:ea typeface="Libre Baskerville Bold"/>
-                <a:cs typeface="Libre Baskerville Bold"/>
-                <a:sym typeface="Libre Baskerville Bold"/>
-              </a:rPr>
-              <a:t>Technology Stack</a:t>
-            </a:r>
-          </a:p>
-        </p:txBody>
-      </p:sp>
-      <p:sp>
-        <p:nvSpPr>
-          <p:cNvPr name="TextBox 21" id="21"/>
-          <p:cNvSpPr txBox="true"/>
-          <p:nvPr/>
-        </p:nvSpPr>
-        <p:spPr>
-          <a:xfrm rot="0">
-            <a:off x="7895373" y="1525729"/>
-            <a:ext cx="6110764" cy="409575"/>
-          </a:xfrm>
-          <a:prstGeom prst="rect">
-            <a:avLst/>
-          </a:prstGeom>
-        </p:spPr>
-        <p:txBody>
-          <a:bodyPr anchor="t" rtlCol="false" tIns="0" lIns="0" bIns="0" rIns="0">
-            <a:spAutoFit/>
-          </a:bodyPr>
-          <a:lstStyle/>
-          <a:p>
-            <a:pPr algn="just">
-              <a:lnSpc>
-                <a:spcPts val="3299"/>
-              </a:lnSpc>
-            </a:pPr>
-            <a:r>
-              <a:rPr lang="en-US" b="true" sz="2749">
-                <a:solidFill>
-                  <a:srgbClr val="C00000"/>
-                </a:solidFill>
-                <a:latin typeface="Libre Baskerville Bold"/>
-                <a:ea typeface="Libre Baskerville Bold"/>
-                <a:cs typeface="Libre Baskerville Bold"/>
-                <a:sym typeface="Libre Baskerville Bold"/>
-              </a:rPr>
-              <a:t>System Architecture &amp; Data Flow</a:t>
-            </a:r>
-          </a:p>
-        </p:txBody>
-      </p:sp>
-      <p:sp>
-        <p:nvSpPr>
-          <p:cNvPr name="TextBox 22" id="22"/>
-          <p:cNvSpPr txBox="true"/>
-          <p:nvPr/>
-        </p:nvSpPr>
-        <p:spPr>
-          <a:xfrm rot="0">
-            <a:off x="1028700" y="9129483"/>
-            <a:ext cx="16459200" cy="466725"/>
-          </a:xfrm>
-          <a:prstGeom prst="rect">
-            <a:avLst/>
-          </a:prstGeom>
-        </p:spPr>
-        <p:txBody>
-          <a:bodyPr anchor="t" rtlCol="false" tIns="0" lIns="0" bIns="0" rIns="0">
-            <a:spAutoFit/>
-          </a:bodyPr>
-          <a:lstStyle/>
-          <a:p>
-            <a:pPr algn="l">
-              <a:lnSpc>
-                <a:spcPts val="1800"/>
-              </a:lnSpc>
-            </a:pPr>
-            <a:r>
-              <a:rPr lang="en-US" sz="1500" i="true">
-                <a:solidFill>
-                  <a:srgbClr val="4A5A66"/>
-                </a:solidFill>
-                <a:latin typeface="Montserrat Italics"/>
-                <a:ea typeface="Montserrat Italics"/>
-                <a:cs typeface="Montserrat Italics"/>
-                <a:sym typeface="Montserrat Italics"/>
-              </a:rPr>
-              <a:t>Train fast in PyTorch → export ONNX → import into MATLAB (importNetworkFromONNX) for inference + Grad-CAM — a hybrid: fastest iteration where it matters, MathWorks tooling where the problem statement calls for it.</a:t>
-            </a:r>
-          </a:p>
-        </p:txBody>
-      </p:sp>
       <p:grpSp>
         <p:nvGrpSpPr>
-          <p:cNvPr name="Group 23" id="23"/>
+          <p:cNvPr name="Group 19" id="19"/>
           <p:cNvGrpSpPr/>
           <p:nvPr/>
         </p:nvGrpSpPr>
@@ -7701,7 +7532,7 @@
         </p:grpSpPr>
         <p:sp>
           <p:nvSpPr>
-            <p:cNvPr name="Freeform 24" id="24"/>
+            <p:cNvPr name="Freeform 20" id="20"/>
             <p:cNvSpPr/>
             <p:nvPr/>
           </p:nvSpPr>
@@ -7738,7 +7569,7 @@
               </a:pathLst>
             </a:custGeom>
             <a:blipFill>
-              <a:blip r:embed="rId8"/>
+              <a:blip r:embed="rId7"/>
               <a:stretch>
                 <a:fillRect l="-1736" t="0" r="-1736" b="0"/>
               </a:stretch>
@@ -7746,6 +7577,175 @@
           </p:spPr>
         </p:sp>
       </p:grpSp>
+      <p:sp>
+        <p:nvSpPr>
+          <p:cNvPr name="Freeform 21" id="21"/>
+          <p:cNvSpPr/>
+          <p:nvPr/>
+        </p:nvSpPr>
+        <p:spPr>
+          <a:xfrm flipH="false" flipV="false" rot="0">
+            <a:off x="6895248" y="1935304"/>
+            <a:ext cx="11180478" cy="7453652"/>
+          </a:xfrm>
+          <a:custGeom>
+            <a:avLst/>
+            <a:gdLst/>
+            <a:ahLst/>
+            <a:cxnLst/>
+            <a:rect r="r" b="b" t="t" l="l"/>
+            <a:pathLst>
+              <a:path h="7453652" w="11180478">
+                <a:moveTo>
+                  <a:pt x="0" y="0"/>
+                </a:moveTo>
+                <a:lnTo>
+                  <a:pt x="11180478" y="0"/>
+                </a:lnTo>
+                <a:lnTo>
+                  <a:pt x="11180478" y="7453653"/>
+                </a:lnTo>
+                <a:lnTo>
+                  <a:pt x="0" y="7453653"/>
+                </a:lnTo>
+                <a:lnTo>
+                  <a:pt x="0" y="0"/>
+                </a:lnTo>
+                <a:close/>
+              </a:path>
+            </a:pathLst>
+          </a:custGeom>
+          <a:blipFill>
+            <a:blip r:embed="rId8"/>
+            <a:stretch>
+              <a:fillRect l="0" t="0" r="0" b="0"/>
+            </a:stretch>
+          </a:blipFill>
+        </p:spPr>
+      </p:sp>
+      <p:sp>
+        <p:nvSpPr>
+          <p:cNvPr name="TextBox 22" id="22"/>
+          <p:cNvSpPr txBox="true"/>
+          <p:nvPr/>
+        </p:nvSpPr>
+        <p:spPr>
+          <a:xfrm rot="0">
+            <a:off x="1089057" y="1509712"/>
+            <a:ext cx="3304104" cy="409575"/>
+          </a:xfrm>
+          <a:prstGeom prst="rect">
+            <a:avLst/>
+          </a:prstGeom>
+        </p:spPr>
+        <p:txBody>
+          <a:bodyPr anchor="t" rtlCol="false" tIns="0" lIns="0" bIns="0" rIns="0">
+            <a:spAutoFit/>
+          </a:bodyPr>
+          <a:lstStyle/>
+          <a:p>
+            <a:pPr algn="just">
+              <a:lnSpc>
+                <a:spcPts val="3299"/>
+              </a:lnSpc>
+            </a:pPr>
+            <a:r>
+              <a:rPr lang="en-US" b="true" sz="2749">
+                <a:solidFill>
+                  <a:srgbClr val="C00000"/>
+                </a:solidFill>
+                <a:latin typeface="Libre Baskerville Bold"/>
+                <a:ea typeface="Libre Baskerville Bold"/>
+                <a:cs typeface="Libre Baskerville Bold"/>
+                <a:sym typeface="Libre Baskerville Bold"/>
+              </a:rPr>
+              <a:t>Technology Stack</a:t>
+            </a:r>
+          </a:p>
+        </p:txBody>
+      </p:sp>
+      <p:sp>
+        <p:nvSpPr>
+          <p:cNvPr name="TextBox 23" id="23"/>
+          <p:cNvSpPr txBox="true"/>
+          <p:nvPr/>
+        </p:nvSpPr>
+        <p:spPr>
+          <a:xfrm rot="0">
+            <a:off x="7895373" y="1525729"/>
+            <a:ext cx="6110764" cy="409575"/>
+          </a:xfrm>
+          <a:prstGeom prst="rect">
+            <a:avLst/>
+          </a:prstGeom>
+        </p:spPr>
+        <p:txBody>
+          <a:bodyPr anchor="t" rtlCol="false" tIns="0" lIns="0" bIns="0" rIns="0">
+            <a:spAutoFit/>
+          </a:bodyPr>
+          <a:lstStyle/>
+          <a:p>
+            <a:pPr algn="just">
+              <a:lnSpc>
+                <a:spcPts val="3299"/>
+              </a:lnSpc>
+            </a:pPr>
+            <a:r>
+              <a:rPr lang="en-US" b="true" sz="2749">
+                <a:solidFill>
+                  <a:srgbClr val="C00000"/>
+                </a:solidFill>
+                <a:latin typeface="Libre Baskerville Bold"/>
+                <a:ea typeface="Libre Baskerville Bold"/>
+                <a:cs typeface="Libre Baskerville Bold"/>
+                <a:sym typeface="Libre Baskerville Bold"/>
+              </a:rPr>
+              <a:t>System Architecture &amp; Data Flow</a:t>
+            </a:r>
+          </a:p>
+        </p:txBody>
+      </p:sp>
+      <p:sp>
+        <p:nvSpPr>
+          <p:cNvPr name="TextBox 24" id="24"/>
+          <p:cNvSpPr txBox="true"/>
+          <p:nvPr/>
+        </p:nvSpPr>
+        <p:spPr>
+          <a:xfrm rot="0">
+            <a:off x="1028700" y="9129483"/>
+            <a:ext cx="16459200" cy="466725"/>
+          </a:xfrm>
+          <a:prstGeom prst="rect">
+            <a:avLst/>
+          </a:prstGeom>
+        </p:spPr>
+        <p:txBody>
+          <a:bodyPr anchor="t" rtlCol="false" tIns="0" lIns="0" bIns="0" rIns="0">
+            <a:spAutoFit/>
+          </a:bodyPr>
+          <a:lstStyle/>
+          <a:p>
+            <a:pPr algn="l">
+              <a:lnSpc>
+                <a:spcPts val="1800"/>
+              </a:lnSpc>
+            </a:pPr>
+            <a:r>
+              <a:rPr lang="en-US" sz="1500" i="true">
+                <a:solidFill>
+                  <a:srgbClr val="4A5A66"/>
+                </a:solidFill>
+                <a:latin typeface="Montserrat Italics"/>
+                <a:ea typeface="Montserrat Italics"/>
+                <a:cs typeface="Montserrat Italics"/>
+                <a:sym typeface="Montserrat Italics"/>
+              </a:rPr>
+              <a:t>Train fast in PyTorch → export ONNX → import into MATLAB (importNetworkFromONNX) for inference + Grad-CAM — a hybrid: fastest iteration where it matters, MathWorks tooling where the problem statement calls for it.</a:t>
+            </a:r>
+          </a:p>
+        </p:txBody>
+      </p:sp>
     </p:spTree>
   </p:cSld>
   <p:clrMapOvr>

--- a/submission/Veyronix_SIH26038_DRISHTI_PPT.pptx
+++ b/submission/Veyronix_SIH26038_DRISHTI_PPT.pptx
@@ -5525,7 +5525,7 @@
         </p:nvGrpSpPr>
         <p:grpSpPr>
           <a:xfrm rot="0">
-            <a:off x="1605188" y="7687419"/>
+            <a:off x="2182424" y="7687419"/>
             <a:ext cx="14415523" cy="2051894"/>
             <a:chOff x="0" y="0"/>
             <a:chExt cx="19220697" cy="2735858"/>
@@ -6649,7 +6649,7 @@
         <p:spPr>
           <a:xfrm rot="0">
             <a:off x="1305002" y="1636605"/>
-            <a:ext cx="15446398" cy="1747838"/>
+            <a:ext cx="16170367" cy="1747838"/>
           </a:xfrm>
           <a:prstGeom prst="rect">
             <a:avLst/>
@@ -6815,6 +6815,38 @@
                 <a:cs typeface="Montserrat Semi-Bold"/>
                 <a:sym typeface="Montserrat Semi-Bold"/>
               </a:rPr>
+              <a:t>GitHub Repository: </a:t>
+            </a:r>
+            <a:r>
+              <a:rPr lang="en-US" b="true" sz="1875" u="sng">
+                <a:solidFill>
+                  <a:srgbClr val="13293D"/>
+                </a:solidFill>
+                <a:latin typeface="Montserrat Semi-Bold"/>
+                <a:ea typeface="Montserrat Semi-Bold"/>
+                <a:cs typeface="Montserrat Semi-Bold"/>
+                <a:sym typeface="Montserrat Semi-Bold"/>
+                <a:hlinkClick r:id="rId10" tooltip="https://github.com/ThePhantom007/Drishti"/>
+              </a:rPr>
+              <a:t>https://github.com/ThePhantom007/Drishti</a:t>
+            </a:r>
+          </a:p>
+          <a:p>
+            <a:pPr algn="just">
+              <a:lnSpc>
+                <a:spcPts val="2812"/>
+              </a:lnSpc>
+            </a:pPr>
+            <a:r>
+              <a:rPr lang="en-US" sz="1875" b="true">
+                <a:solidFill>
+                  <a:srgbClr val="13293D"/>
+                </a:solidFill>
+                <a:latin typeface="Montserrat Semi-Bold"/>
+                <a:ea typeface="Montserrat Semi-Bold"/>
+                <a:cs typeface="Montserrat Semi-Bold"/>
+                <a:sym typeface="Montserrat Semi-Bold"/>
+              </a:rPr>
               <a:t>Live Deployment: </a:t>
             </a:r>
             <a:r>
@@ -6826,7 +6858,7 @@
                 <a:ea typeface="Montserrat Semi-Bold"/>
                 <a:cs typeface="Montserrat Semi-Bold"/>
                 <a:sym typeface="Montserrat Semi-Bold"/>
-                <a:hlinkClick r:id="rId10" tooltip="https://drishti-frontend-c9mj.onrender.com"/>
+                <a:hlinkClick r:id="rId11" tooltip="https://drishti-frontend-c9mj.onrender.com"/>
               </a:rPr>
               <a:t>https://drishti-frontend-c9mj.onrender.com/</a:t>
             </a:r>

--- a/submission/Veyronix_SIH26038_DRISHTI_PPT.pptx
+++ b/submission/Veyronix_SIH26038_DRISHTI_PPT.pptx
@@ -4929,7 +4929,7 @@
                 <a:cs typeface="Libre Baskerville"/>
                 <a:sym typeface="Libre Baskerville"/>
               </a:rPr>
-              <a:t>NSUT012</a:t>
+              <a:t>178208</a:t>
             </a:r>
           </a:p>
           <a:p>
@@ -4962,7 +4962,7 @@
                 <a:cs typeface="Libre Baskerville"/>
                 <a:sym typeface="Libre Baskerville"/>
               </a:rPr>
-              <a:t> Veyronix</a:t>
+              <a:t> _Veyronix_</a:t>
             </a:r>
           </a:p>
         </p:txBody>
